--- a/in_class_slides/geog4300_L02-Data science and coding.pptx
+++ b/in_class_slides/geog4300_L02-Data science and coding.pptx
@@ -9325,63 +9325,15 @@
           </a:prstGeom>
         </p:spPr>
       </p:pic>
-      <p:sp>
-        <p:nvSpPr>
-          <p:cNvPr id="4" name="Shape 178">
-            <a:extLst>
-              <a:ext uri="{FF2B5EF4-FFF2-40B4-BE49-F238E27FC236}">
-                <a16:creationId xmlns:a16="http://schemas.microsoft.com/office/drawing/2014/main" id="{C3B41642-BA7C-1138-5086-7A61B96A3101}"/>
-              </a:ext>
-            </a:extLst>
-          </p:cNvPr>
-          <p:cNvSpPr txBox="1"/>
-          <p:nvPr/>
-        </p:nvSpPr>
-        <p:spPr>
-          <a:xfrm>
-            <a:off x="631686" y="299647"/>
-            <a:ext cx="8884847" cy="707886"/>
-          </a:xfrm>
-          <a:prstGeom prst="rect">
-            <a:avLst/>
-          </a:prstGeom>
-          <a:noFill/>
-          <a:ln>
-            <a:noFill/>
-          </a:ln>
-        </p:spPr>
-        <p:txBody>
-          <a:bodyPr lIns="91425" tIns="45700" rIns="91425" bIns="45700" anchor="t" anchorCtr="0">
-            <a:noAutofit/>
-          </a:bodyPr>
-          <a:lstStyle/>
-          <a:p>
-            <a:pPr>
-              <a:buSzPct val="25000"/>
-            </a:pPr>
-            <a:r>
-              <a:rPr lang="en-US" sz="4000" dirty="0">
-                <a:solidFill>
-                  <a:schemeClr val="tx1">
-                    <a:lumMod val="75000"/>
-                  </a:schemeClr>
-                </a:solidFill>
-                <a:latin typeface="+mj-lt"/>
-                <a:ea typeface="Calibri"/>
-                <a:cs typeface="Calibri"/>
-                <a:sym typeface="Calibri"/>
-              </a:rPr>
-              <a:t>Arrays (multi-dimensional)</a:t>
-            </a:r>
-          </a:p>
-        </p:txBody>
-      </p:sp>
       <p:cxnSp>
         <p:nvCxnSpPr>
           <p:cNvPr id="7" name="Straight Arrow Connector 6">
             <a:extLst>
               <a:ext uri="{FF2B5EF4-FFF2-40B4-BE49-F238E27FC236}">
                 <a16:creationId xmlns:a16="http://schemas.microsoft.com/office/drawing/2014/main" id="{C095966E-31C9-BA64-1DC7-18E5334D3F5E}"/>
+              </a:ext>
+              <a:ext uri="{C183D7F6-B498-43B3-948B-1728B52AA6E4}">
+                <adec:decorative xmlns:adec="http://schemas.microsoft.com/office/drawing/2017/decorative" val="1"/>
               </a:ext>
             </a:extLst>
           </p:cNvPr>
@@ -9499,6 +9451,49 @@
           </a:prstGeom>
         </p:spPr>
       </p:pic>
+      <p:sp>
+        <p:nvSpPr>
+          <p:cNvPr id="5" name="Title 4">
+            <a:extLst>
+              <a:ext uri="{FF2B5EF4-FFF2-40B4-BE49-F238E27FC236}">
+                <a16:creationId xmlns:a16="http://schemas.microsoft.com/office/drawing/2014/main" id="{28929820-C320-48FF-9DE6-BA1C21CB91B5}"/>
+              </a:ext>
+            </a:extLst>
+          </p:cNvPr>
+          <p:cNvSpPr>
+            <a:spLocks noGrp="1"/>
+          </p:cNvSpPr>
+          <p:nvPr>
+            <p:ph type="title" idx="4294967295"/>
+          </p:nvPr>
+        </p:nvSpPr>
+        <p:spPr>
+          <a:xfrm>
+            <a:off x="498070" y="393776"/>
+            <a:ext cx="10058400" cy="849340"/>
+          </a:xfrm>
+        </p:spPr>
+        <p:txBody>
+          <a:bodyPr/>
+          <a:lstStyle/>
+          <a:p>
+            <a:pPr rtl="0" eaLnBrk="1" latinLnBrk="0" hangingPunct="1"/>
+            <a:r>
+              <a:rPr lang="en-US" sz="4000" kern="1200" dirty="0">
+                <a:solidFill>
+                  <a:srgbClr val="2F2F2F"/>
+                </a:solidFill>
+                <a:effectLst/>
+                <a:latin typeface="Sitka Display Semibold" pitchFamily="2" charset="0"/>
+                <a:ea typeface="Calibri" panose="020F0502020204030204" pitchFamily="34" charset="0"/>
+                <a:cs typeface="Calibri" panose="020F0502020204030204" pitchFamily="34" charset="0"/>
+              </a:rPr>
+              <a:t>Arrays (multi-dimensional)</a:t>
+            </a:r>
+            <a:endParaRPr lang="en-US" dirty="0"/>
+          </a:p>
+        </p:txBody>
+      </p:sp>
     </p:spTree>
     <p:extLst>
       <p:ext uri="{BB962C8B-B14F-4D97-AF65-F5344CB8AC3E}">
@@ -9537,54 +9532,15 @@
           <a:chExt cx="0" cy="0"/>
         </a:xfrm>
       </p:grpSpPr>
-      <p:sp>
-        <p:nvSpPr>
-          <p:cNvPr id="167" name="Shape 167"/>
-          <p:cNvSpPr txBox="1"/>
-          <p:nvPr/>
-        </p:nvSpPr>
-        <p:spPr>
-          <a:xfrm>
-            <a:off x="1241779" y="773401"/>
-            <a:ext cx="6917565" cy="707886"/>
-          </a:xfrm>
-          <a:prstGeom prst="rect">
-            <a:avLst/>
-          </a:prstGeom>
-          <a:noFill/>
-          <a:ln>
-            <a:noFill/>
-          </a:ln>
-        </p:spPr>
-        <p:txBody>
-          <a:bodyPr lIns="91425" tIns="45700" rIns="91425" bIns="45700" anchor="t" anchorCtr="0">
-            <a:noAutofit/>
-          </a:bodyPr>
-          <a:lstStyle/>
-          <a:p>
-            <a:pPr>
-              <a:buSzPct val="25000"/>
-            </a:pPr>
-            <a:r>
-              <a:rPr lang="en-US" sz="4000" dirty="0">
-                <a:solidFill>
-                  <a:schemeClr val="tx1">
-                    <a:lumMod val="75000"/>
-                  </a:schemeClr>
-                </a:solidFill>
-                <a:latin typeface="+mj-lt"/>
-                <a:ea typeface="Calibri"/>
-                <a:cs typeface="Calibri"/>
-                <a:sym typeface="Calibri"/>
-              </a:rPr>
-              <a:t>2. Methods of analysis</a:t>
-            </a:r>
-          </a:p>
-        </p:txBody>
-      </p:sp>
       <p:pic>
         <p:nvPicPr>
-          <p:cNvPr id="168" name="Shape 168"/>
+          <p:cNvPr id="168" name="Shape 168">
+            <a:extLst>
+              <a:ext uri="{C183D7F6-B498-43B3-948B-1728B52AA6E4}">
+                <adec:decorative xmlns:adec="http://schemas.microsoft.com/office/drawing/2017/decorative" val="1"/>
+              </a:ext>
+            </a:extLst>
+          </p:cNvPr>
           <p:cNvPicPr preferRelativeResize="0"/>
           <p:nvPr/>
         </p:nvPicPr>
@@ -9749,6 +9705,44 @@
               <a:cs typeface="Calibri"/>
               <a:sym typeface="Calibri"/>
             </a:endParaRPr>
+          </a:p>
+        </p:txBody>
+      </p:sp>
+      <p:sp>
+        <p:nvSpPr>
+          <p:cNvPr id="3" name="Title 2">
+            <a:extLst>
+              <a:ext uri="{FF2B5EF4-FFF2-40B4-BE49-F238E27FC236}">
+                <a16:creationId xmlns:a16="http://schemas.microsoft.com/office/drawing/2014/main" id="{BAD1FF2B-60FD-45C6-A37F-03B782F8B674}"/>
+              </a:ext>
+            </a:extLst>
+          </p:cNvPr>
+          <p:cNvSpPr>
+            <a:spLocks noGrp="1"/>
+          </p:cNvSpPr>
+          <p:nvPr>
+            <p:ph type="title"/>
+          </p:nvPr>
+        </p:nvSpPr>
+        <p:spPr/>
+        <p:txBody>
+          <a:bodyPr/>
+          <a:lstStyle/>
+          <a:p>
+            <a:pPr rtl="0" eaLnBrk="1" latinLnBrk="0" hangingPunct="1"/>
+            <a:r>
+              <a:rPr lang="en-US" sz="4000" kern="1200" dirty="0">
+                <a:solidFill>
+                  <a:srgbClr val="2F2F2F"/>
+                </a:solidFill>
+                <a:effectLst/>
+                <a:latin typeface="Sitka Display Semibold" pitchFamily="2" charset="0"/>
+                <a:ea typeface="Calibri" panose="020F0502020204030204" pitchFamily="34" charset="0"/>
+                <a:cs typeface="Calibri" panose="020F0502020204030204" pitchFamily="34" charset="0"/>
+              </a:rPr>
+              <a:t>2. Methods of analysis</a:t>
+            </a:r>
+            <a:endParaRPr lang="en-US" dirty="0"/>
           </a:p>
         </p:txBody>
       </p:sp>
@@ -9787,7 +9781,7 @@
       </p:grpSpPr>
       <p:pic>
         <p:nvPicPr>
-          <p:cNvPr id="233" name="Shape 233" descr="http://prabasiva.files.wordpress.com/2012/04/big-data-iceberg1.jpg"/>
+          <p:cNvPr id="233" name="Shape 233" descr="http://prabasiva.files.wordpress.com/2012/04/big-data-iceberg1.jpg&#10;&#10;Big data"/>
           <p:cNvPicPr preferRelativeResize="0"/>
           <p:nvPr/>
         </p:nvPicPr>
@@ -9814,7 +9808,13 @@
       </p:pic>
       <p:pic>
         <p:nvPicPr>
-          <p:cNvPr id="234" name="Shape 234" descr="http://qualityandinnovation.files.wordpress.com/2012/09/top-20-data-vis.jpg"/>
+          <p:cNvPr id="234" name="Shape 234">
+            <a:extLst>
+              <a:ext uri="{C183D7F6-B498-43B3-948B-1728B52AA6E4}">
+                <adec:decorative xmlns:adec="http://schemas.microsoft.com/office/drawing/2017/decorative" val="1"/>
+              </a:ext>
+            </a:extLst>
+          </p:cNvPr>
           <p:cNvPicPr preferRelativeResize="0"/>
           <p:nvPr/>
         </p:nvPicPr>
@@ -9845,6 +9845,9 @@
             <a:extLst>
               <a:ext uri="{FF2B5EF4-FFF2-40B4-BE49-F238E27FC236}">
                 <a16:creationId xmlns:a16="http://schemas.microsoft.com/office/drawing/2014/main" id="{EAEFC137-7747-4A7A-BF66-C93A7E7CA2DB}"/>
+              </a:ext>
+              <a:ext uri="{C183D7F6-B498-43B3-948B-1728B52AA6E4}">
+                <adec:decorative xmlns:adec="http://schemas.microsoft.com/office/drawing/2017/decorative" val="1"/>
               </a:ext>
             </a:extLst>
           </p:cNvPr>
@@ -9868,58 +9871,6 @@
           </a:prstGeom>
         </p:spPr>
       </p:pic>
-      <p:sp>
-        <p:nvSpPr>
-          <p:cNvPr id="2" name="Shape 167">
-            <a:extLst>
-              <a:ext uri="{FF2B5EF4-FFF2-40B4-BE49-F238E27FC236}">
-                <a16:creationId xmlns:a16="http://schemas.microsoft.com/office/drawing/2014/main" id="{608A7FA6-E913-20C4-ABDE-B138E0C50A76}"/>
-              </a:ext>
-            </a:extLst>
-          </p:cNvPr>
-          <p:cNvSpPr txBox="1"/>
-          <p:nvPr/>
-        </p:nvSpPr>
-        <p:spPr>
-          <a:xfrm>
-            <a:off x="539347" y="823470"/>
-            <a:ext cx="6917565" cy="707886"/>
-          </a:xfrm>
-          <a:prstGeom prst="rect">
-            <a:avLst/>
-          </a:prstGeom>
-          <a:noFill/>
-          <a:ln>
-            <a:noFill/>
-          </a:ln>
-        </p:spPr>
-        <p:txBody>
-          <a:bodyPr lIns="91425" tIns="45700" rIns="91425" bIns="45700" anchor="t" anchorCtr="0">
-            <a:noAutofit/>
-          </a:bodyPr>
-          <a:lstStyle/>
-          <a:p>
-            <a:pPr>
-              <a:buSzPct val="25000"/>
-            </a:pPr>
-            <a:r>
-              <a:rPr lang="en-US" sz="4000" dirty="0">
-                <a:solidFill>
-                  <a:schemeClr val="tx1">
-                    <a:lumMod val="85000"/>
-                    <a:lumOff val="15000"/>
-                  </a:schemeClr>
-                </a:solidFill>
-                <a:latin typeface="+mj-lt"/>
-                <a:ea typeface="Calibri"/>
-                <a:cs typeface="Calibri"/>
-                <a:sym typeface="Calibri"/>
-              </a:rPr>
-              <a:t>3. Data workflow</a:t>
-            </a:r>
-          </a:p>
-        </p:txBody>
-      </p:sp>
       <p:sp>
         <p:nvSpPr>
           <p:cNvPr id="4" name="Slide Number Placeholder 3">
@@ -9967,6 +9918,100 @@
               <a:ea typeface="Calibri"/>
               <a:cs typeface="Calibri"/>
               <a:sym typeface="Calibri"/>
+            </a:endParaRPr>
+          </a:p>
+        </p:txBody>
+      </p:sp>
+      <p:sp>
+        <p:nvSpPr>
+          <p:cNvPr id="9" name="Shape 167">
+            <a:extLst>
+              <a:ext uri="{FF2B5EF4-FFF2-40B4-BE49-F238E27FC236}">
+                <a16:creationId xmlns:a16="http://schemas.microsoft.com/office/drawing/2014/main" id="{66D588AE-94F0-4B7A-B69E-F1FEB903CD80}"/>
+              </a:ext>
+            </a:extLst>
+          </p:cNvPr>
+          <p:cNvSpPr txBox="1"/>
+          <p:nvPr/>
+        </p:nvSpPr>
+        <p:spPr>
+          <a:xfrm>
+            <a:off x="539347" y="823470"/>
+            <a:ext cx="6917565" cy="707886"/>
+          </a:xfrm>
+          <a:prstGeom prst="rect">
+            <a:avLst/>
+          </a:prstGeom>
+          <a:noFill/>
+          <a:ln>
+            <a:noFill/>
+          </a:ln>
+        </p:spPr>
+        <p:txBody>
+          <a:bodyPr lIns="91425" tIns="45700" rIns="91425" bIns="45700" anchor="t" anchorCtr="0">
+            <a:noAutofit/>
+          </a:bodyPr>
+          <a:lstStyle/>
+          <a:p>
+            <a:pPr>
+              <a:buSzPct val="25000"/>
+            </a:pPr>
+            <a:endParaRPr lang="en-US" sz="4000" dirty="0">
+              <a:solidFill>
+                <a:schemeClr val="tx1">
+                  <a:lumMod val="85000"/>
+                  <a:lumOff val="15000"/>
+                </a:schemeClr>
+              </a:solidFill>
+              <a:latin typeface="+mj-lt"/>
+              <a:ea typeface="Calibri"/>
+              <a:cs typeface="Calibri"/>
+              <a:sym typeface="Calibri"/>
+            </a:endParaRPr>
+          </a:p>
+        </p:txBody>
+      </p:sp>
+      <p:sp>
+        <p:nvSpPr>
+          <p:cNvPr id="5" name="Title 4">
+            <a:extLst>
+              <a:ext uri="{FF2B5EF4-FFF2-40B4-BE49-F238E27FC236}">
+                <a16:creationId xmlns:a16="http://schemas.microsoft.com/office/drawing/2014/main" id="{58F86828-62FC-4A3E-932E-059AF7121AF5}"/>
+              </a:ext>
+            </a:extLst>
+          </p:cNvPr>
+          <p:cNvSpPr>
+            <a:spLocks noGrp="1"/>
+          </p:cNvSpPr>
+          <p:nvPr>
+            <p:ph type="title"/>
+          </p:nvPr>
+        </p:nvSpPr>
+        <p:spPr>
+          <a:xfrm>
+            <a:off x="1097280" y="823470"/>
+            <a:ext cx="10058400" cy="913890"/>
+          </a:xfrm>
+        </p:spPr>
+        <p:txBody>
+          <a:bodyPr/>
+          <a:lstStyle/>
+          <a:p>
+            <a:pPr rtl="0" eaLnBrk="1" latinLnBrk="0" hangingPunct="1"/>
+            <a:r>
+              <a:rPr lang="en-US" sz="4000" kern="1200" dirty="0">
+                <a:solidFill>
+                  <a:srgbClr val="5C5C5C"/>
+                </a:solidFill>
+                <a:effectLst/>
+                <a:latin typeface="Sitka Display Semibold" pitchFamily="2" charset="0"/>
+                <a:ea typeface="Calibri" panose="020F0502020204030204" pitchFamily="34" charset="0"/>
+                <a:cs typeface="Calibri" panose="020F0502020204030204" pitchFamily="34" charset="0"/>
+              </a:rPr>
+              <a:t>3. Data workflow</a:t>
+            </a:r>
+            <a:endParaRPr lang="en-US" dirty="0">
+              <a:effectLst/>
             </a:endParaRPr>
           </a:p>
         </p:txBody>
@@ -10012,57 +10057,6 @@
       </p:grpSpPr>
       <p:sp>
         <p:nvSpPr>
-          <p:cNvPr id="2" name="Shape 167">
-            <a:extLst>
-              <a:ext uri="{FF2B5EF4-FFF2-40B4-BE49-F238E27FC236}">
-                <a16:creationId xmlns:a16="http://schemas.microsoft.com/office/drawing/2014/main" id="{FD6E43AF-9A03-02E4-F28B-81C4F6493ABA}"/>
-              </a:ext>
-            </a:extLst>
-          </p:cNvPr>
-          <p:cNvSpPr txBox="1"/>
-          <p:nvPr/>
-        </p:nvSpPr>
-        <p:spPr>
-          <a:xfrm>
-            <a:off x="1126369" y="778314"/>
-            <a:ext cx="9440031" cy="707886"/>
-          </a:xfrm>
-          <a:prstGeom prst="rect">
-            <a:avLst/>
-          </a:prstGeom>
-          <a:noFill/>
-          <a:ln>
-            <a:noFill/>
-          </a:ln>
-        </p:spPr>
-        <p:txBody>
-          <a:bodyPr lIns="91425" tIns="45700" rIns="91425" bIns="45700" anchor="t" anchorCtr="0">
-            <a:noAutofit/>
-          </a:bodyPr>
-          <a:lstStyle/>
-          <a:p>
-            <a:pPr>
-              <a:buSzPct val="25000"/>
-            </a:pPr>
-            <a:r>
-              <a:rPr lang="en-US" sz="4000" dirty="0">
-                <a:solidFill>
-                  <a:schemeClr val="tx1">
-                    <a:lumMod val="75000"/>
-                  </a:schemeClr>
-                </a:solidFill>
-                <a:latin typeface="+mj-lt"/>
-                <a:ea typeface="Calibri"/>
-                <a:cs typeface="Calibri"/>
-                <a:sym typeface="Calibri"/>
-              </a:rPr>
-              <a:t>How is data science different? (Or is it?)</a:t>
-            </a:r>
-          </a:p>
-        </p:txBody>
-      </p:sp>
-      <p:sp>
-        <p:nvSpPr>
           <p:cNvPr id="4" name="Slide Number Placeholder 3">
             <a:extLst>
               <a:ext uri="{FF2B5EF4-FFF2-40B4-BE49-F238E27FC236}">
@@ -10145,6 +10139,46 @@
           </a:prstGeom>
         </p:spPr>
       </p:pic>
+      <p:sp>
+        <p:nvSpPr>
+          <p:cNvPr id="3" name="Title 2">
+            <a:extLst>
+              <a:ext uri="{FF2B5EF4-FFF2-40B4-BE49-F238E27FC236}">
+                <a16:creationId xmlns:a16="http://schemas.microsoft.com/office/drawing/2014/main" id="{E8FDEA74-CBAF-43A1-A803-F95DFAD71F4E}"/>
+              </a:ext>
+            </a:extLst>
+          </p:cNvPr>
+          <p:cNvSpPr>
+            <a:spLocks noGrp="1"/>
+          </p:cNvSpPr>
+          <p:nvPr>
+            <p:ph type="title"/>
+          </p:nvPr>
+        </p:nvSpPr>
+        <p:spPr/>
+        <p:txBody>
+          <a:bodyPr/>
+          <a:lstStyle/>
+          <a:p>
+            <a:pPr rtl="0" eaLnBrk="1" latinLnBrk="0" hangingPunct="1"/>
+            <a:r>
+              <a:rPr lang="en-US" sz="4000" kern="1200" dirty="0">
+                <a:solidFill>
+                  <a:srgbClr val="2F2F2F"/>
+                </a:solidFill>
+                <a:effectLst/>
+                <a:latin typeface="Sitka Display Semibold" pitchFamily="2" charset="0"/>
+                <a:ea typeface="Calibri" panose="020F0502020204030204" pitchFamily="34" charset="0"/>
+                <a:cs typeface="Calibri" panose="020F0502020204030204" pitchFamily="34" charset="0"/>
+              </a:rPr>
+              <a:t>How is data science different? (Or is it?)</a:t>
+            </a:r>
+            <a:endParaRPr lang="en-US" dirty="0">
+              <a:effectLst/>
+            </a:endParaRPr>
+          </a:p>
+        </p:txBody>
+      </p:sp>
     </p:spTree>
     <p:extLst>
       <p:ext uri="{BB962C8B-B14F-4D97-AF65-F5344CB8AC3E}">
@@ -10326,57 +10360,6 @@
       </p:grpSpPr>
       <p:sp>
         <p:nvSpPr>
-          <p:cNvPr id="2" name="Shape 167">
-            <a:extLst>
-              <a:ext uri="{FF2B5EF4-FFF2-40B4-BE49-F238E27FC236}">
-                <a16:creationId xmlns:a16="http://schemas.microsoft.com/office/drawing/2014/main" id="{FD6E43AF-9A03-02E4-F28B-81C4F6493ABA}"/>
-              </a:ext>
-            </a:extLst>
-          </p:cNvPr>
-          <p:cNvSpPr txBox="1"/>
-          <p:nvPr/>
-        </p:nvSpPr>
-        <p:spPr>
-          <a:xfrm>
-            <a:off x="1126369" y="778314"/>
-            <a:ext cx="9440031" cy="707886"/>
-          </a:xfrm>
-          <a:prstGeom prst="rect">
-            <a:avLst/>
-          </a:prstGeom>
-          <a:noFill/>
-          <a:ln>
-            <a:noFill/>
-          </a:ln>
-        </p:spPr>
-        <p:txBody>
-          <a:bodyPr lIns="91425" tIns="45700" rIns="91425" bIns="45700" anchor="t" anchorCtr="0">
-            <a:noAutofit/>
-          </a:bodyPr>
-          <a:lstStyle/>
-          <a:p>
-            <a:pPr>
-              <a:buSzPct val="25000"/>
-            </a:pPr>
-            <a:r>
-              <a:rPr lang="en-US" sz="4000" dirty="0">
-                <a:solidFill>
-                  <a:schemeClr val="tx1">
-                    <a:lumMod val="75000"/>
-                  </a:schemeClr>
-                </a:solidFill>
-                <a:latin typeface="+mj-lt"/>
-                <a:ea typeface="Calibri"/>
-                <a:cs typeface="Calibri"/>
-                <a:sym typeface="Calibri"/>
-              </a:rPr>
-              <a:t>Why code?</a:t>
-            </a:r>
-          </a:p>
-        </p:txBody>
-      </p:sp>
-      <p:sp>
-        <p:nvSpPr>
           <p:cNvPr id="4" name="Slide Number Placeholder 3">
             <a:extLst>
               <a:ext uri="{FF2B5EF4-FFF2-40B4-BE49-F238E27FC236}">
@@ -10673,6 +10656,34 @@
               </a:solidFill>
               <a:cs typeface="Calibri" panose="020F0502020204030204" pitchFamily="34" charset="0"/>
             </a:endParaRPr>
+          </a:p>
+        </p:txBody>
+      </p:sp>
+      <p:sp>
+        <p:nvSpPr>
+          <p:cNvPr id="5" name="Title 4">
+            <a:extLst>
+              <a:ext uri="{FF2B5EF4-FFF2-40B4-BE49-F238E27FC236}">
+                <a16:creationId xmlns:a16="http://schemas.microsoft.com/office/drawing/2014/main" id="{B79ACCD9-33D5-4BCE-ACA1-470316F2C30D}"/>
+              </a:ext>
+            </a:extLst>
+          </p:cNvPr>
+          <p:cNvSpPr>
+            <a:spLocks noGrp="1"/>
+          </p:cNvSpPr>
+          <p:nvPr>
+            <p:ph type="title"/>
+          </p:nvPr>
+        </p:nvSpPr>
+        <p:spPr/>
+        <p:txBody>
+          <a:bodyPr/>
+          <a:lstStyle/>
+          <a:p>
+            <a:r>
+              <a:rPr lang="en-US" dirty="0"/>
+              <a:t>Why code?</a:t>
+            </a:r>
           </a:p>
         </p:txBody>
       </p:sp>
@@ -10735,7 +10746,7 @@
         </p:spPr>
         <p:txBody>
           <a:bodyPr vert="horz" lIns="91440" tIns="45720" rIns="91440" bIns="45720" rtlCol="0" anchor="b" anchorCtr="0">
-            <a:normAutofit fontScale="92500"/>
+            <a:normAutofit/>
           </a:bodyPr>
           <a:lstStyle/>
           <a:p>
@@ -10751,17 +10762,14 @@
               </a:spcAft>
               <a:buSzPct val="25000"/>
             </a:pPr>
-            <a:r>
-              <a:rPr lang="en-US" sz="4800" b="0" kern="1200" spc="-50" baseline="0" dirty="0">
-                <a:solidFill>
-                  <a:srgbClr val="FFFFFF"/>
-                </a:solidFill>
-                <a:latin typeface="Sitka Display Semibold" pitchFamily="2" charset="0"/>
-                <a:ea typeface="+mj-ea"/>
-                <a:cs typeface="+mj-cs"/>
-              </a:rPr>
-              <a:t>Object-oriented programming</a:t>
-            </a:r>
+            <a:endParaRPr lang="en-US" sz="4800" b="0" kern="1200" spc="-50" baseline="0" dirty="0">
+              <a:solidFill>
+                <a:srgbClr val="FFFFFF"/>
+              </a:solidFill>
+              <a:latin typeface="Sitka Display Semibold" pitchFamily="2" charset="0"/>
+              <a:ea typeface="+mj-ea"/>
+              <a:cs typeface="+mj-cs"/>
+            </a:endParaRPr>
           </a:p>
         </p:txBody>
       </p:sp>
@@ -10890,6 +10898,48 @@
               <a:latin typeface="Calibri"/>
               <a:cs typeface="Calibri"/>
               <a:sym typeface="Calibri"/>
+            </a:endParaRPr>
+          </a:p>
+        </p:txBody>
+      </p:sp>
+      <p:sp>
+        <p:nvSpPr>
+          <p:cNvPr id="3" name="Title 2">
+            <a:extLst>
+              <a:ext uri="{FF2B5EF4-FFF2-40B4-BE49-F238E27FC236}">
+                <a16:creationId xmlns:a16="http://schemas.microsoft.com/office/drawing/2014/main" id="{14CC907A-6C0B-4E96-B72C-3629A2A7C82B}"/>
+              </a:ext>
+            </a:extLst>
+          </p:cNvPr>
+          <p:cNvSpPr>
+            <a:spLocks noGrp="1"/>
+          </p:cNvSpPr>
+          <p:nvPr>
+            <p:ph type="title"/>
+          </p:nvPr>
+        </p:nvSpPr>
+        <p:spPr/>
+        <p:txBody>
+          <a:bodyPr>
+            <a:normAutofit fontScale="90000"/>
+          </a:bodyPr>
+          <a:lstStyle/>
+          <a:p>
+            <a:pPr rtl="0" eaLnBrk="1" latinLnBrk="0" hangingPunct="1"/>
+            <a:r>
+              <a:rPr lang="en-US" sz="4400" b="0" kern="1200" spc="-50" baseline="0" dirty="0">
+                <a:solidFill>
+                  <a:srgbClr val="FFFFFF"/>
+                </a:solidFill>
+                <a:effectLst/>
+                <a:latin typeface="Sitka Display Semibold" pitchFamily="2" charset="0"/>
+                <a:ea typeface="+mn-ea"/>
+                <a:cs typeface="+mn-cs"/>
+              </a:rPr>
+              <a:t>Object-oriented programming</a:t>
+            </a:r>
+            <a:endParaRPr lang="en-US" dirty="0">
+              <a:effectLst/>
             </a:endParaRPr>
           </a:p>
         </p:txBody>
@@ -11709,57 +11759,6 @@
       </p:sp>
       <p:sp>
         <p:nvSpPr>
-          <p:cNvPr id="8" name="Shape 208">
-            <a:extLst>
-              <a:ext uri="{FF2B5EF4-FFF2-40B4-BE49-F238E27FC236}">
-                <a16:creationId xmlns:a16="http://schemas.microsoft.com/office/drawing/2014/main" id="{B5ED5A12-E140-4B27-8ED2-A376D55B0764}"/>
-              </a:ext>
-            </a:extLst>
-          </p:cNvPr>
-          <p:cNvSpPr txBox="1"/>
-          <p:nvPr/>
-        </p:nvSpPr>
-        <p:spPr>
-          <a:xfrm>
-            <a:off x="1002242" y="774603"/>
-            <a:ext cx="8680450" cy="769441"/>
-          </a:xfrm>
-          <a:prstGeom prst="rect">
-            <a:avLst/>
-          </a:prstGeom>
-          <a:noFill/>
-          <a:ln>
-            <a:noFill/>
-          </a:ln>
-        </p:spPr>
-        <p:txBody>
-          <a:bodyPr lIns="91425" tIns="45700" rIns="91425" bIns="45700" anchor="t" anchorCtr="0">
-            <a:noAutofit/>
-          </a:bodyPr>
-          <a:lstStyle/>
-          <a:p>
-            <a:pPr>
-              <a:buSzPct val="25000"/>
-            </a:pPr>
-            <a:r>
-              <a:rPr lang="en-US" sz="4400" dirty="0">
-                <a:solidFill>
-                  <a:schemeClr val="tx1">
-                    <a:lumMod val="75000"/>
-                  </a:schemeClr>
-                </a:solidFill>
-                <a:latin typeface="+mj-lt"/>
-                <a:ea typeface="Calibri"/>
-                <a:cs typeface="Calibri"/>
-                <a:sym typeface="Calibri"/>
-              </a:rPr>
-              <a:t>Next time: Getting started with R!</a:t>
-            </a:r>
-          </a:p>
-        </p:txBody>
-      </p:sp>
-      <p:sp>
-        <p:nvSpPr>
           <p:cNvPr id="6" name="Rectangle 5">
             <a:extLst>
               <a:ext uri="{FF2B5EF4-FFF2-40B4-BE49-F238E27FC236}">
@@ -11968,6 +11967,44 @@
               <a:cs typeface="Calibri"/>
               <a:sym typeface="Calibri"/>
             </a:endParaRPr>
+          </a:p>
+        </p:txBody>
+      </p:sp>
+      <p:sp>
+        <p:nvSpPr>
+          <p:cNvPr id="4" name="Title 3">
+            <a:extLst>
+              <a:ext uri="{FF2B5EF4-FFF2-40B4-BE49-F238E27FC236}">
+                <a16:creationId xmlns:a16="http://schemas.microsoft.com/office/drawing/2014/main" id="{84AA68DB-ACB7-4CE1-88CF-D0E4A5DAF05E}"/>
+              </a:ext>
+            </a:extLst>
+          </p:cNvPr>
+          <p:cNvSpPr>
+            <a:spLocks noGrp="1"/>
+          </p:cNvSpPr>
+          <p:nvPr>
+            <p:ph type="title"/>
+          </p:nvPr>
+        </p:nvSpPr>
+        <p:spPr/>
+        <p:txBody>
+          <a:bodyPr/>
+          <a:lstStyle/>
+          <a:p>
+            <a:pPr rtl="0" eaLnBrk="1" latinLnBrk="0" hangingPunct="1"/>
+            <a:r>
+              <a:rPr lang="en-US" sz="4400" kern="1200" dirty="0">
+                <a:solidFill>
+                  <a:srgbClr val="2F2F2F"/>
+                </a:solidFill>
+                <a:effectLst/>
+                <a:latin typeface="Sitka Display Semibold" pitchFamily="2" charset="0"/>
+                <a:ea typeface="Calibri" panose="020F0502020204030204" pitchFamily="34" charset="0"/>
+                <a:cs typeface="Calibri" panose="020F0502020204030204" pitchFamily="34" charset="0"/>
+              </a:rPr>
+              <a:t>Next time: Getting started with R!</a:t>
+            </a:r>
+            <a:endParaRPr lang="en-US" dirty="0"/>
           </a:p>
         </p:txBody>
       </p:sp>
@@ -12217,58 +12254,6 @@
       </p:sp>
       <p:sp>
         <p:nvSpPr>
-          <p:cNvPr id="8" name="Shape 208">
-            <a:extLst>
-              <a:ext uri="{FF2B5EF4-FFF2-40B4-BE49-F238E27FC236}">
-                <a16:creationId xmlns:a16="http://schemas.microsoft.com/office/drawing/2014/main" id="{B5ED5A12-E140-4B27-8ED2-A376D55B0764}"/>
-              </a:ext>
-            </a:extLst>
-          </p:cNvPr>
-          <p:cNvSpPr txBox="1"/>
-          <p:nvPr/>
-        </p:nvSpPr>
-        <p:spPr>
-          <a:xfrm>
-            <a:off x="1049866" y="769939"/>
-            <a:ext cx="9674578" cy="769441"/>
-          </a:xfrm>
-          <a:prstGeom prst="rect">
-            <a:avLst/>
-          </a:prstGeom>
-          <a:noFill/>
-          <a:ln>
-            <a:noFill/>
-          </a:ln>
-        </p:spPr>
-        <p:txBody>
-          <a:bodyPr lIns="91425" tIns="45700" rIns="91425" bIns="45700" anchor="t" anchorCtr="0">
-            <a:noAutofit/>
-          </a:bodyPr>
-          <a:lstStyle/>
-          <a:p>
-            <a:pPr>
-              <a:buSzPct val="25000"/>
-            </a:pPr>
-            <a:r>
-              <a:rPr lang="en-US" sz="4400" dirty="0">
-                <a:solidFill>
-                  <a:schemeClr val="tx1">
-                    <a:lumMod val="85000"/>
-                    <a:lumOff val="15000"/>
-                  </a:schemeClr>
-                </a:solidFill>
-                <a:latin typeface="+mj-lt"/>
-                <a:ea typeface="Calibri"/>
-                <a:cs typeface="Calibri"/>
-                <a:sym typeface="Calibri"/>
-              </a:rPr>
-              <a:t>What words do you think of when you think of statistics?</a:t>
-            </a:r>
-          </a:p>
-        </p:txBody>
-      </p:sp>
-      <p:sp>
-        <p:nvSpPr>
           <p:cNvPr id="3" name="Slide Number Placeholder 2">
             <a:extLst>
               <a:ext uri="{FF2B5EF4-FFF2-40B4-BE49-F238E27FC236}">
@@ -12325,6 +12310,9 @@
               <a:ext uri="{FF2B5EF4-FFF2-40B4-BE49-F238E27FC236}">
                 <a16:creationId xmlns:a16="http://schemas.microsoft.com/office/drawing/2014/main" id="{DAEAA2DA-DEAB-6B17-237B-0579A5F7A73E}"/>
               </a:ext>
+              <a:ext uri="{C183D7F6-B498-43B3-948B-1728B52AA6E4}">
+                <adec:decorative xmlns:adec="http://schemas.microsoft.com/office/drawing/2017/decorative" val="1"/>
+              </a:ext>
             </a:extLst>
           </p:cNvPr>
           <p:cNvSpPr txBox="1"/>
@@ -12359,6 +12347,9 @@
             <a:extLst>
               <a:ext uri="{FF2B5EF4-FFF2-40B4-BE49-F238E27FC236}">
                 <a16:creationId xmlns:a16="http://schemas.microsoft.com/office/drawing/2014/main" id="{B2384710-F7B3-F8F0-D5F0-620B771CB915}"/>
+              </a:ext>
+              <a:ext uri="{C183D7F6-B498-43B3-948B-1728B52AA6E4}">
+                <adec:decorative xmlns:adec="http://schemas.microsoft.com/office/drawing/2017/decorative" val="1"/>
               </a:ext>
             </a:extLst>
           </p:cNvPr>
@@ -12383,6 +12374,51 @@
           </a:prstGeom>
         </p:spPr>
       </p:pic>
+      <p:sp>
+        <p:nvSpPr>
+          <p:cNvPr id="5" name="Title 4">
+            <a:extLst>
+              <a:ext uri="{FF2B5EF4-FFF2-40B4-BE49-F238E27FC236}">
+                <a16:creationId xmlns:a16="http://schemas.microsoft.com/office/drawing/2014/main" id="{AB0F933B-F1A3-4994-A108-16DD31F1EE50}"/>
+              </a:ext>
+            </a:extLst>
+          </p:cNvPr>
+          <p:cNvSpPr>
+            <a:spLocks noGrp="1"/>
+          </p:cNvSpPr>
+          <p:nvPr>
+            <p:ph type="title" idx="4294967295"/>
+          </p:nvPr>
+        </p:nvSpPr>
+        <p:spPr>
+          <a:xfrm>
+            <a:off x="1097280" y="296542"/>
+            <a:ext cx="10058400" cy="1450757"/>
+          </a:xfrm>
+        </p:spPr>
+        <p:txBody>
+          <a:bodyPr/>
+          <a:lstStyle/>
+          <a:p>
+            <a:pPr rtl="0" eaLnBrk="1" latinLnBrk="0" hangingPunct="1"/>
+            <a:r>
+              <a:rPr lang="en-US" sz="4400" kern="1200" dirty="0">
+                <a:solidFill>
+                  <a:srgbClr val="5C5C5C"/>
+                </a:solidFill>
+                <a:effectLst/>
+                <a:latin typeface="Sitka Display Semibold" pitchFamily="2" charset="0"/>
+                <a:ea typeface="Calibri" panose="020F0502020204030204" pitchFamily="34" charset="0"/>
+                <a:cs typeface="Calibri" panose="020F0502020204030204" pitchFamily="34" charset="0"/>
+              </a:rPr>
+              <a:t>What words do you think of when you think of statistics?</a:t>
+            </a:r>
+            <a:endParaRPr lang="en-US" dirty="0">
+              <a:effectLst/>
+            </a:endParaRPr>
+          </a:p>
+        </p:txBody>
+      </p:sp>
     </p:spTree>
     <p:extLst>
       <p:ext uri="{BB962C8B-B14F-4D97-AF65-F5344CB8AC3E}">
@@ -12663,64 +12699,15 @@
           </a:p>
         </p:txBody>
       </p:sp>
-      <p:sp>
-        <p:nvSpPr>
-          <p:cNvPr id="8" name="Shape 208">
-            <a:extLst>
-              <a:ext uri="{FF2B5EF4-FFF2-40B4-BE49-F238E27FC236}">
-                <a16:creationId xmlns:a16="http://schemas.microsoft.com/office/drawing/2014/main" id="{8952DAA7-CAC9-9E63-BBDA-0FF79985C00E}"/>
-              </a:ext>
-            </a:extLst>
-          </p:cNvPr>
-          <p:cNvSpPr txBox="1"/>
-          <p:nvPr/>
-        </p:nvSpPr>
-        <p:spPr>
-          <a:xfrm>
-            <a:off x="1049866" y="769939"/>
-            <a:ext cx="7772400" cy="769441"/>
-          </a:xfrm>
-          <a:prstGeom prst="rect">
-            <a:avLst/>
-          </a:prstGeom>
-          <a:noFill/>
-          <a:ln>
-            <a:noFill/>
-          </a:ln>
-        </p:spPr>
-        <p:txBody>
-          <a:bodyPr lIns="91425" tIns="45700" rIns="91425" bIns="45700" anchor="t" anchorCtr="0">
-            <a:noAutofit/>
-          </a:bodyPr>
-          <a:lstStyle/>
-          <a:p>
-            <a:pPr>
-              <a:buSzPct val="25000"/>
-            </a:pPr>
-            <a:r>
-              <a:rPr lang="en-US" sz="4400" dirty="0">
-                <a:solidFill>
-                  <a:schemeClr val="tx1">
-                    <a:lumMod val="85000"/>
-                    <a:lumOff val="15000"/>
-                  </a:schemeClr>
-                </a:solidFill>
-                <a:latin typeface="+mj-lt"/>
-                <a:ea typeface="Calibri"/>
-                <a:cs typeface="Calibri"/>
-                <a:sym typeface="Calibri"/>
-              </a:rPr>
-              <a:t>Types of statistics</a:t>
-            </a:r>
-          </a:p>
-        </p:txBody>
-      </p:sp>
       <p:pic>
         <p:nvPicPr>
-          <p:cNvPr id="9" name="Shape 146" descr="http://mwcz.org/img/019/mean_median_mode.png">
+          <p:cNvPr id="9" name="Shape 146">
             <a:extLst>
               <a:ext uri="{FF2B5EF4-FFF2-40B4-BE49-F238E27FC236}">
                 <a16:creationId xmlns:a16="http://schemas.microsoft.com/office/drawing/2014/main" id="{FC1E7A98-41EB-E5EE-4B2B-8FC21209905E}"/>
+              </a:ext>
+              <a:ext uri="{C183D7F6-B498-43B3-948B-1728B52AA6E4}">
+                <adec:decorative xmlns:adec="http://schemas.microsoft.com/office/drawing/2017/decorative" val="1"/>
               </a:ext>
             </a:extLst>
           </p:cNvPr>
@@ -12750,10 +12737,13 @@
       </p:pic>
       <p:pic>
         <p:nvPicPr>
-          <p:cNvPr id="10" name="Shape 147" descr="http://www.ats.ucla.edu/stat/mult_pkg/faq/general/noconstant.png">
+          <p:cNvPr id="10" name="Shape 147">
             <a:extLst>
               <a:ext uri="{FF2B5EF4-FFF2-40B4-BE49-F238E27FC236}">
                 <a16:creationId xmlns:a16="http://schemas.microsoft.com/office/drawing/2014/main" id="{4B548555-02A6-4F82-B51C-1DDF0598C1FF}"/>
+              </a:ext>
+              <a:ext uri="{C183D7F6-B498-43B3-948B-1728B52AA6E4}">
+                <adec:decorative xmlns:adec="http://schemas.microsoft.com/office/drawing/2017/decorative" val="1"/>
               </a:ext>
             </a:extLst>
           </p:cNvPr>
@@ -12787,6 +12777,9 @@
             <a:extLst>
               <a:ext uri="{FF2B5EF4-FFF2-40B4-BE49-F238E27FC236}">
                 <a16:creationId xmlns:a16="http://schemas.microsoft.com/office/drawing/2014/main" id="{9928B4E8-CB40-CA40-07A2-EBC6B7C70652}"/>
+              </a:ext>
+              <a:ext uri="{C183D7F6-B498-43B3-948B-1728B52AA6E4}">
+                <adec:decorative xmlns:adec="http://schemas.microsoft.com/office/drawing/2017/decorative" val="1"/>
               </a:ext>
             </a:extLst>
           </p:cNvPr>
@@ -12858,6 +12851,54 @@
               <a:cs typeface="Calibri"/>
               <a:sym typeface="Calibri"/>
             </a:endParaRPr>
+          </a:p>
+        </p:txBody>
+      </p:sp>
+      <p:sp>
+        <p:nvSpPr>
+          <p:cNvPr id="5" name="Title 4">
+            <a:extLst>
+              <a:ext uri="{FF2B5EF4-FFF2-40B4-BE49-F238E27FC236}">
+                <a16:creationId xmlns:a16="http://schemas.microsoft.com/office/drawing/2014/main" id="{D29E3D55-D622-4EF4-A562-86DCCD5D2AB2}"/>
+              </a:ext>
+            </a:extLst>
+          </p:cNvPr>
+          <p:cNvSpPr>
+            <a:spLocks noGrp="1"/>
+          </p:cNvSpPr>
+          <p:nvPr>
+            <p:ph type="title"/>
+          </p:nvPr>
+        </p:nvSpPr>
+        <p:spPr>
+          <a:xfrm>
+            <a:off x="1097280" y="743803"/>
+            <a:ext cx="10058400" cy="1450757"/>
+          </a:xfrm>
+        </p:spPr>
+        <p:txBody>
+          <a:bodyPr/>
+          <a:lstStyle/>
+          <a:p>
+            <a:pPr rtl="0" eaLnBrk="1" latinLnBrk="0" hangingPunct="1"/>
+            <a:r>
+              <a:rPr lang="en-US" sz="4400" kern="1200" dirty="0">
+                <a:solidFill>
+                  <a:srgbClr val="5C5C5C"/>
+                </a:solidFill>
+                <a:effectLst/>
+                <a:latin typeface="Sitka Display Semibold" pitchFamily="2" charset="0"/>
+                <a:ea typeface="Calibri" panose="020F0502020204030204" pitchFamily="34" charset="0"/>
+                <a:cs typeface="Calibri" panose="020F0502020204030204" pitchFamily="34" charset="0"/>
+              </a:rPr>
+              <a:t>Types of statistics</a:t>
+            </a:r>
+            <a:endParaRPr lang="en-US" dirty="0">
+              <a:effectLst/>
+            </a:endParaRPr>
+          </a:p>
+          <a:p>
+            <a:endParaRPr lang="en-US" dirty="0"/>
           </a:p>
         </p:txBody>
       </p:sp>
@@ -13105,64 +13146,15 @@
           </a:p>
         </p:txBody>
       </p:sp>
-      <p:sp>
-        <p:nvSpPr>
-          <p:cNvPr id="8" name="Shape 208">
-            <a:extLst>
-              <a:ext uri="{FF2B5EF4-FFF2-40B4-BE49-F238E27FC236}">
-                <a16:creationId xmlns:a16="http://schemas.microsoft.com/office/drawing/2014/main" id="{B5ED5A12-E140-4B27-8ED2-A376D55B0764}"/>
-              </a:ext>
-            </a:extLst>
-          </p:cNvPr>
-          <p:cNvSpPr txBox="1"/>
-          <p:nvPr/>
-        </p:nvSpPr>
-        <p:spPr>
-          <a:xfrm>
-            <a:off x="1117600" y="665836"/>
-            <a:ext cx="7772400" cy="769441"/>
-          </a:xfrm>
-          <a:prstGeom prst="rect">
-            <a:avLst/>
-          </a:prstGeom>
-          <a:noFill/>
-          <a:ln>
-            <a:noFill/>
-          </a:ln>
-        </p:spPr>
-        <p:txBody>
-          <a:bodyPr lIns="91425" tIns="45700" rIns="91425" bIns="45700" anchor="t" anchorCtr="0">
-            <a:noAutofit/>
-          </a:bodyPr>
-          <a:lstStyle/>
-          <a:p>
-            <a:pPr>
-              <a:buSzPct val="25000"/>
-            </a:pPr>
-            <a:r>
-              <a:rPr lang="en-US" sz="4400" dirty="0">
-                <a:solidFill>
-                  <a:schemeClr val="tx1">
-                    <a:lumMod val="85000"/>
-                    <a:lumOff val="15000"/>
-                  </a:schemeClr>
-                </a:solidFill>
-                <a:latin typeface="+mj-lt"/>
-                <a:ea typeface="Calibri"/>
-                <a:cs typeface="Calibri"/>
-                <a:sym typeface="Calibri"/>
-              </a:rPr>
-              <a:t>Descriptive statistics</a:t>
-            </a:r>
-          </a:p>
-        </p:txBody>
-      </p:sp>
       <p:pic>
         <p:nvPicPr>
-          <p:cNvPr id="9" name="Shape 146" descr="http://mwcz.org/img/019/mean_median_mode.png">
+          <p:cNvPr id="9" name="Shape 146">
             <a:extLst>
               <a:ext uri="{FF2B5EF4-FFF2-40B4-BE49-F238E27FC236}">
                 <a16:creationId xmlns:a16="http://schemas.microsoft.com/office/drawing/2014/main" id="{C61195E6-5007-4614-9CE0-604BEC19443B}"/>
+              </a:ext>
+              <a:ext uri="{C183D7F6-B498-43B3-948B-1728B52AA6E4}">
+                <adec:decorative xmlns:adec="http://schemas.microsoft.com/office/drawing/2017/decorative" val="1"/>
               </a:ext>
             </a:extLst>
           </p:cNvPr>
@@ -13328,6 +13320,9 @@
             <a:extLst>
               <a:ext uri="{FF2B5EF4-FFF2-40B4-BE49-F238E27FC236}">
                 <a16:creationId xmlns:a16="http://schemas.microsoft.com/office/drawing/2014/main" id="{4538B799-D326-40B1-B44B-9094848B2B7D}"/>
+              </a:ext>
+              <a:ext uri="{C183D7F6-B498-43B3-948B-1728B52AA6E4}">
+                <adec:decorative xmlns:adec="http://schemas.microsoft.com/office/drawing/2017/decorative" val="1"/>
               </a:ext>
             </a:extLst>
           </p:cNvPr>
@@ -13399,6 +13394,54 @@
               <a:cs typeface="Calibri"/>
               <a:sym typeface="Calibri"/>
             </a:endParaRPr>
+          </a:p>
+        </p:txBody>
+      </p:sp>
+      <p:sp>
+        <p:nvSpPr>
+          <p:cNvPr id="5" name="Title 4">
+            <a:extLst>
+              <a:ext uri="{FF2B5EF4-FFF2-40B4-BE49-F238E27FC236}">
+                <a16:creationId xmlns:a16="http://schemas.microsoft.com/office/drawing/2014/main" id="{E5AD1E01-3E53-4B11-84A8-1B0CA9AFBDBB}"/>
+              </a:ext>
+            </a:extLst>
+          </p:cNvPr>
+          <p:cNvSpPr>
+            <a:spLocks noGrp="1"/>
+          </p:cNvSpPr>
+          <p:nvPr>
+            <p:ph type="title"/>
+          </p:nvPr>
+        </p:nvSpPr>
+        <p:spPr>
+          <a:xfrm>
+            <a:off x="1097280" y="654350"/>
+            <a:ext cx="10058400" cy="1450757"/>
+          </a:xfrm>
+        </p:spPr>
+        <p:txBody>
+          <a:bodyPr/>
+          <a:lstStyle/>
+          <a:p>
+            <a:pPr rtl="0" eaLnBrk="1" latinLnBrk="0" hangingPunct="1"/>
+            <a:r>
+              <a:rPr lang="en-US" sz="4400" kern="1200" dirty="0">
+                <a:solidFill>
+                  <a:srgbClr val="5C5C5C"/>
+                </a:solidFill>
+                <a:effectLst/>
+                <a:latin typeface="Sitka Display Semibold" pitchFamily="2" charset="0"/>
+                <a:ea typeface="Calibri" panose="020F0502020204030204" pitchFamily="34" charset="0"/>
+                <a:cs typeface="Calibri" panose="020F0502020204030204" pitchFamily="34" charset="0"/>
+              </a:rPr>
+              <a:t>Descriptive statistics</a:t>
+            </a:r>
+            <a:endParaRPr lang="en-US" dirty="0">
+              <a:effectLst/>
+            </a:endParaRPr>
+          </a:p>
+          <a:p>
+            <a:endParaRPr lang="en-US" dirty="0"/>
           </a:p>
         </p:txBody>
       </p:sp>
@@ -13648,57 +13691,6 @@
       </p:sp>
       <p:sp>
         <p:nvSpPr>
-          <p:cNvPr id="8" name="Shape 208">
-            <a:extLst>
-              <a:ext uri="{FF2B5EF4-FFF2-40B4-BE49-F238E27FC236}">
-                <a16:creationId xmlns:a16="http://schemas.microsoft.com/office/drawing/2014/main" id="{B5ED5A12-E140-4B27-8ED2-A376D55B0764}"/>
-              </a:ext>
-            </a:extLst>
-          </p:cNvPr>
-          <p:cNvSpPr txBox="1"/>
-          <p:nvPr/>
-        </p:nvSpPr>
-        <p:spPr>
-          <a:xfrm>
-            <a:off x="1128889" y="837998"/>
-            <a:ext cx="7772400" cy="769441"/>
-          </a:xfrm>
-          <a:prstGeom prst="rect">
-            <a:avLst/>
-          </a:prstGeom>
-          <a:noFill/>
-          <a:ln>
-            <a:noFill/>
-          </a:ln>
-        </p:spPr>
-        <p:txBody>
-          <a:bodyPr lIns="91425" tIns="45700" rIns="91425" bIns="45700" anchor="t" anchorCtr="0">
-            <a:noAutofit/>
-          </a:bodyPr>
-          <a:lstStyle/>
-          <a:p>
-            <a:pPr>
-              <a:buSzPct val="25000"/>
-            </a:pPr>
-            <a:r>
-              <a:rPr lang="en-US" sz="4400" dirty="0">
-                <a:solidFill>
-                  <a:schemeClr val="tx1">
-                    <a:lumMod val="75000"/>
-                  </a:schemeClr>
-                </a:solidFill>
-                <a:latin typeface="+mj-lt"/>
-                <a:ea typeface="Calibri"/>
-                <a:cs typeface="Calibri"/>
-                <a:sym typeface="Calibri"/>
-              </a:rPr>
-              <a:t>Inferential statistics</a:t>
-            </a:r>
-          </a:p>
-        </p:txBody>
-      </p:sp>
-      <p:sp>
-        <p:nvSpPr>
           <p:cNvPr id="3" name="Rectangle 2">
             <a:extLst>
               <a:ext uri="{FF2B5EF4-FFF2-40B4-BE49-F238E27FC236}">
@@ -13877,10 +13869,13 @@
       </p:sp>
       <p:pic>
         <p:nvPicPr>
-          <p:cNvPr id="14" name="Shape 147" descr="http://www.ats.ucla.edu/stat/mult_pkg/faq/general/noconstant.png">
+          <p:cNvPr id="14" name="Shape 147">
             <a:extLst>
               <a:ext uri="{FF2B5EF4-FFF2-40B4-BE49-F238E27FC236}">
                 <a16:creationId xmlns:a16="http://schemas.microsoft.com/office/drawing/2014/main" id="{22C12108-4117-4598-9123-489C463848AE}"/>
+              </a:ext>
+              <a:ext uri="{C183D7F6-B498-43B3-948B-1728B52AA6E4}">
+                <adec:decorative xmlns:adec="http://schemas.microsoft.com/office/drawing/2017/decorative" val="1"/>
               </a:ext>
             </a:extLst>
           </p:cNvPr>
@@ -13914,6 +13909,9 @@
             <a:extLst>
               <a:ext uri="{FF2B5EF4-FFF2-40B4-BE49-F238E27FC236}">
                 <a16:creationId xmlns:a16="http://schemas.microsoft.com/office/drawing/2014/main" id="{0AD05EAA-0B09-4DB6-A05D-925569AA4A33}"/>
+              </a:ext>
+              <a:ext uri="{C183D7F6-B498-43B3-948B-1728B52AA6E4}">
+                <adec:decorative xmlns:adec="http://schemas.microsoft.com/office/drawing/2017/decorative" val="1"/>
               </a:ext>
             </a:extLst>
           </p:cNvPr>
@@ -13986,6 +13984,49 @@
               <a:cs typeface="Calibri"/>
               <a:sym typeface="Calibri"/>
             </a:endParaRPr>
+          </a:p>
+        </p:txBody>
+      </p:sp>
+      <p:sp>
+        <p:nvSpPr>
+          <p:cNvPr id="5" name="Title 4">
+            <a:extLst>
+              <a:ext uri="{FF2B5EF4-FFF2-40B4-BE49-F238E27FC236}">
+                <a16:creationId xmlns:a16="http://schemas.microsoft.com/office/drawing/2014/main" id="{B7D8506B-51BB-4EF2-BB4A-5F76F58AE347}"/>
+              </a:ext>
+            </a:extLst>
+          </p:cNvPr>
+          <p:cNvSpPr>
+            <a:spLocks noGrp="1"/>
+          </p:cNvSpPr>
+          <p:nvPr>
+            <p:ph type="title"/>
+          </p:nvPr>
+        </p:nvSpPr>
+        <p:spPr>
+          <a:xfrm>
+            <a:off x="1097280" y="876277"/>
+            <a:ext cx="10058400" cy="801449"/>
+          </a:xfrm>
+        </p:spPr>
+        <p:txBody>
+          <a:bodyPr/>
+          <a:lstStyle/>
+          <a:p>
+            <a:pPr rtl="0" eaLnBrk="1" latinLnBrk="0" hangingPunct="1"/>
+            <a:r>
+              <a:rPr lang="en-US" sz="4400" kern="1200" dirty="0">
+                <a:solidFill>
+                  <a:srgbClr val="2F2F2F"/>
+                </a:solidFill>
+                <a:effectLst/>
+                <a:latin typeface="Sitka Display Semibold" pitchFamily="2" charset="0"/>
+                <a:ea typeface="Calibri" panose="020F0502020204030204" pitchFamily="34" charset="0"/>
+                <a:cs typeface="Calibri" panose="020F0502020204030204" pitchFamily="34" charset="0"/>
+              </a:rPr>
+              <a:t>Inferential statistics</a:t>
+            </a:r>
+            <a:endParaRPr lang="en-US" dirty="0"/>
           </a:p>
         </p:txBody>
       </p:sp>
@@ -14248,21 +14289,18 @@
             <a:pPr>
               <a:buSzPct val="25000"/>
             </a:pPr>
-            <a:r>
-              <a:rPr lang="en-US" sz="4400" dirty="0">
-                <a:solidFill>
-                  <a:schemeClr val="tx1">
-                    <a:lumMod val="85000"/>
-                    <a:lumOff val="15000"/>
-                  </a:schemeClr>
-                </a:solidFill>
-                <a:latin typeface="+mj-lt"/>
-                <a:ea typeface="Calibri"/>
-                <a:cs typeface="Calibri"/>
-                <a:sym typeface="Calibri"/>
-              </a:rPr>
-              <a:t>Spatial statistics</a:t>
-            </a:r>
+            <a:endParaRPr lang="en-US" sz="4400" dirty="0">
+              <a:solidFill>
+                <a:schemeClr val="tx1">
+                  <a:lumMod val="85000"/>
+                  <a:lumOff val="15000"/>
+                </a:schemeClr>
+              </a:solidFill>
+              <a:latin typeface="+mj-lt"/>
+              <a:ea typeface="Calibri"/>
+              <a:cs typeface="Calibri"/>
+              <a:sym typeface="Calibri"/>
+            </a:endParaRPr>
           </a:p>
         </p:txBody>
       </p:sp>
@@ -14378,6 +14416,9 @@
             <a:extLst>
               <a:ext uri="{FF2B5EF4-FFF2-40B4-BE49-F238E27FC236}">
                 <a16:creationId xmlns:a16="http://schemas.microsoft.com/office/drawing/2014/main" id="{1353B2A5-8BED-4A82-9366-99D73D997B73}"/>
+              </a:ext>
+              <a:ext uri="{C183D7F6-B498-43B3-948B-1728B52AA6E4}">
+                <adec:decorative xmlns:adec="http://schemas.microsoft.com/office/drawing/2017/decorative" val="1"/>
               </a:ext>
             </a:extLst>
           </p:cNvPr>
@@ -14408,6 +14449,9 @@
             <a:extLst>
               <a:ext uri="{FF2B5EF4-FFF2-40B4-BE49-F238E27FC236}">
                 <a16:creationId xmlns:a16="http://schemas.microsoft.com/office/drawing/2014/main" id="{362499F4-4C3B-4B60-BD20-67AA9C85AF17}"/>
+              </a:ext>
+              <a:ext uri="{C183D7F6-B498-43B3-948B-1728B52AA6E4}">
+                <adec:decorative xmlns:adec="http://schemas.microsoft.com/office/drawing/2017/decorative" val="1"/>
               </a:ext>
             </a:extLst>
           </p:cNvPr>
@@ -14480,6 +14524,45 @@
               <a:cs typeface="Calibri"/>
               <a:sym typeface="Calibri"/>
             </a:endParaRPr>
+          </a:p>
+        </p:txBody>
+      </p:sp>
+      <p:sp>
+        <p:nvSpPr>
+          <p:cNvPr id="9" name="Title 8">
+            <a:extLst>
+              <a:ext uri="{FF2B5EF4-FFF2-40B4-BE49-F238E27FC236}">
+                <a16:creationId xmlns:a16="http://schemas.microsoft.com/office/drawing/2014/main" id="{1FC90511-6DF6-4370-B2C5-BAC79ED5CA3F}"/>
+              </a:ext>
+            </a:extLst>
+          </p:cNvPr>
+          <p:cNvSpPr>
+            <a:spLocks noGrp="1"/>
+          </p:cNvSpPr>
+          <p:nvPr>
+            <p:ph type="title"/>
+          </p:nvPr>
+        </p:nvSpPr>
+        <p:spPr/>
+        <p:txBody>
+          <a:bodyPr/>
+          <a:lstStyle/>
+          <a:p>
+            <a:r>
+              <a:rPr lang="en-US" dirty="0">
+                <a:solidFill>
+                  <a:schemeClr val="tx1">
+                    <a:lumMod val="85000"/>
+                    <a:lumOff val="15000"/>
+                  </a:schemeClr>
+                </a:solidFill>
+                <a:ea typeface="Calibri"/>
+                <a:cs typeface="Calibri"/>
+                <a:sym typeface="Calibri"/>
+              </a:rPr>
+              <a:t>Spatial statistics</a:t>
+            </a:r>
+            <a:endParaRPr lang="en-US" dirty="0"/>
           </a:p>
         </p:txBody>
       </p:sp>
@@ -14546,17 +14629,14 @@
               </a:spcAft>
               <a:buSzPct val="25000"/>
             </a:pPr>
-            <a:r>
-              <a:rPr lang="en-US" sz="4000" b="0" kern="1200" spc="-50" baseline="0" dirty="0">
-                <a:solidFill>
-                  <a:srgbClr val="FFFFFF"/>
-                </a:solidFill>
-                <a:latin typeface="Sitka Display Semibold" pitchFamily="2" charset="0"/>
-                <a:ea typeface="+mj-ea"/>
-                <a:cs typeface="+mj-cs"/>
-              </a:rPr>
-              <a:t>What’s distinctive about statistics in geography?</a:t>
-            </a:r>
+            <a:endParaRPr lang="en-US" sz="4000" b="0" kern="1200" spc="-50" baseline="0" dirty="0">
+              <a:solidFill>
+                <a:srgbClr val="FFFFFF"/>
+              </a:solidFill>
+              <a:latin typeface="Sitka Display Semibold" pitchFamily="2" charset="0"/>
+              <a:ea typeface="+mj-ea"/>
+              <a:cs typeface="+mj-cs"/>
+            </a:endParaRPr>
           </a:p>
         </p:txBody>
       </p:sp>
@@ -14618,10 +14698,13 @@
       </p:sp>
       <p:pic>
         <p:nvPicPr>
-          <p:cNvPr id="4" name="Shape 153" descr="http://www.forwardmapworks.com/wordpress/wp-content/uploads/2012/03/Census_Bureau_Geographers_Cartographers.jpg">
+          <p:cNvPr id="4" name="Shape 153">
             <a:extLst>
               <a:ext uri="{FF2B5EF4-FFF2-40B4-BE49-F238E27FC236}">
                 <a16:creationId xmlns:a16="http://schemas.microsoft.com/office/drawing/2014/main" id="{37435F2A-4427-C8BD-6C69-C21E847A6ED6}"/>
+              </a:ext>
+              <a:ext uri="{C183D7F6-B498-43B3-948B-1728B52AA6E4}">
+                <adec:decorative xmlns:adec="http://schemas.microsoft.com/office/drawing/2017/decorative" val="1"/>
               </a:ext>
             </a:extLst>
           </p:cNvPr>
@@ -14651,6 +14734,51 @@
           </a:ln>
         </p:spPr>
       </p:pic>
+      <p:sp>
+        <p:nvSpPr>
+          <p:cNvPr id="3" name="Title 2">
+            <a:extLst>
+              <a:ext uri="{FF2B5EF4-FFF2-40B4-BE49-F238E27FC236}">
+                <a16:creationId xmlns:a16="http://schemas.microsoft.com/office/drawing/2014/main" id="{701A6997-FAA6-4B5A-87B5-5D07D314715F}"/>
+              </a:ext>
+            </a:extLst>
+          </p:cNvPr>
+          <p:cNvSpPr>
+            <a:spLocks noGrp="1"/>
+          </p:cNvSpPr>
+          <p:nvPr>
+            <p:ph type="title"/>
+          </p:nvPr>
+        </p:nvSpPr>
+        <p:spPr>
+          <a:xfrm>
+            <a:off x="1097280" y="5442667"/>
+            <a:ext cx="10113264" cy="822960"/>
+          </a:xfrm>
+        </p:spPr>
+        <p:txBody>
+          <a:bodyPr/>
+          <a:lstStyle/>
+          <a:p>
+            <a:pPr rtl="0" eaLnBrk="1" latinLnBrk="0" hangingPunct="1"/>
+            <a:r>
+              <a:rPr lang="en-US" sz="4000" b="0" kern="1200" spc="-50" baseline="0" dirty="0">
+                <a:solidFill>
+                  <a:srgbClr val="FFFFFF"/>
+                </a:solidFill>
+                <a:effectLst/>
+                <a:latin typeface="Sitka Display Semibold" pitchFamily="2" charset="0"/>
+                <a:ea typeface="+mn-ea"/>
+                <a:cs typeface="+mn-cs"/>
+              </a:rPr>
+              <a:t>What’s distinctive about statistics in geography?</a:t>
+            </a:r>
+            <a:endParaRPr lang="en-US" dirty="0">
+              <a:effectLst/>
+            </a:endParaRPr>
+          </a:p>
+        </p:txBody>
+      </p:sp>
     </p:spTree>
     <p:extLst>
       <p:ext uri="{BB962C8B-B14F-4D97-AF65-F5344CB8AC3E}">
@@ -14737,7 +14865,13 @@
       </p:sp>
       <p:pic>
         <p:nvPicPr>
-          <p:cNvPr id="176" name="Shape 176" descr="http://www.3dgolfcourse.com/wp-content/uploads/2010/02/willow_creek_lidar_2_sm.jpg"/>
+          <p:cNvPr id="176" name="Shape 176">
+            <a:extLst>
+              <a:ext uri="{C183D7F6-B498-43B3-948B-1728B52AA6E4}">
+                <adec:decorative xmlns:adec="http://schemas.microsoft.com/office/drawing/2017/decorative" val="1"/>
+              </a:ext>
+            </a:extLst>
+          </p:cNvPr>
           <p:cNvPicPr preferRelativeResize="0"/>
           <p:nvPr/>
         </p:nvPicPr>
@@ -14764,7 +14898,13 @@
       </p:pic>
       <p:pic>
         <p:nvPicPr>
-          <p:cNvPr id="177" name="Shape 177" descr="http://www.nass.usda.gov/research/atlas02/Crops/Hay%20and%20Forage%20Crops%20Harvested/Forage%20-%20Land%20Used%20for%20All%20Hay%20and%20All%20Haylage,%20Grass%20Silage,%20and%20Greenchop,%20Harvested%20Acres%202002-choropleth%20map.gif"/>
+          <p:cNvPr id="177" name="Shape 177">
+            <a:extLst>
+              <a:ext uri="{C183D7F6-B498-43B3-948B-1728B52AA6E4}">
+                <adec:decorative xmlns:adec="http://schemas.microsoft.com/office/drawing/2017/decorative" val="1"/>
+              </a:ext>
+            </a:extLst>
+          </p:cNvPr>
           <p:cNvPicPr preferRelativeResize="0"/>
           <p:nvPr/>
         </p:nvPicPr>
@@ -14789,51 +14929,6 @@
           </a:ln>
         </p:spPr>
       </p:pic>
-      <p:sp>
-        <p:nvSpPr>
-          <p:cNvPr id="178" name="Shape 178"/>
-          <p:cNvSpPr txBox="1"/>
-          <p:nvPr/>
-        </p:nvSpPr>
-        <p:spPr>
-          <a:xfrm>
-            <a:off x="1267178" y="803169"/>
-            <a:ext cx="8453761" cy="707886"/>
-          </a:xfrm>
-          <a:prstGeom prst="rect">
-            <a:avLst/>
-          </a:prstGeom>
-          <a:noFill/>
-          <a:ln>
-            <a:noFill/>
-          </a:ln>
-        </p:spPr>
-        <p:txBody>
-          <a:bodyPr lIns="91425" tIns="45700" rIns="91425" bIns="45700" anchor="t" anchorCtr="0">
-            <a:noAutofit/>
-          </a:bodyPr>
-          <a:lstStyle/>
-          <a:p>
-            <a:pPr>
-              <a:buSzPct val="25000"/>
-            </a:pPr>
-            <a:r>
-              <a:rPr lang="en-US" sz="4000" dirty="0">
-                <a:solidFill>
-                  <a:schemeClr val="tx1">
-                    <a:lumMod val="75000"/>
-                  </a:schemeClr>
-                </a:solidFill>
-                <a:latin typeface="+mj-lt"/>
-                <a:ea typeface="Calibri"/>
-                <a:cs typeface="Calibri"/>
-                <a:sym typeface="Calibri"/>
-              </a:rPr>
-              <a:t>1. Data formats and creation methods</a:t>
-            </a:r>
-          </a:p>
-        </p:txBody>
-      </p:sp>
       <p:sp>
         <p:nvSpPr>
           <p:cNvPr id="2" name="Slide Number Placeholder 1">
@@ -14881,6 +14976,51 @@
               <a:ea typeface="Calibri"/>
               <a:cs typeface="Calibri"/>
               <a:sym typeface="Calibri"/>
+            </a:endParaRPr>
+          </a:p>
+        </p:txBody>
+      </p:sp>
+      <p:sp>
+        <p:nvSpPr>
+          <p:cNvPr id="3" name="Title 2">
+            <a:extLst>
+              <a:ext uri="{FF2B5EF4-FFF2-40B4-BE49-F238E27FC236}">
+                <a16:creationId xmlns:a16="http://schemas.microsoft.com/office/drawing/2014/main" id="{61F2AC02-C197-43E8-AB6E-0BFD415AB3BA}"/>
+              </a:ext>
+            </a:extLst>
+          </p:cNvPr>
+          <p:cNvSpPr>
+            <a:spLocks noGrp="1"/>
+          </p:cNvSpPr>
+          <p:nvPr>
+            <p:ph type="title"/>
+          </p:nvPr>
+        </p:nvSpPr>
+        <p:spPr>
+          <a:xfrm>
+            <a:off x="1072444" y="815009"/>
+            <a:ext cx="10058400" cy="846726"/>
+          </a:xfrm>
+        </p:spPr>
+        <p:txBody>
+          <a:bodyPr/>
+          <a:lstStyle/>
+          <a:p>
+            <a:pPr rtl="0" eaLnBrk="1" latinLnBrk="0" hangingPunct="1"/>
+            <a:r>
+              <a:rPr lang="en-US" sz="4000" kern="1200" dirty="0">
+                <a:solidFill>
+                  <a:srgbClr val="2F2F2F"/>
+                </a:solidFill>
+                <a:effectLst/>
+                <a:latin typeface="Sitka Display Semibold" pitchFamily="2" charset="0"/>
+                <a:ea typeface="Calibri" panose="020F0502020204030204" pitchFamily="34" charset="0"/>
+                <a:cs typeface="Calibri" panose="020F0502020204030204" pitchFamily="34" charset="0"/>
+              </a:rPr>
+              <a:t>1. Data formats and creation methods</a:t>
+            </a:r>
+            <a:endParaRPr lang="en-US" dirty="0">
+              <a:effectLst/>
             </a:endParaRPr>
           </a:p>
         </p:txBody>
@@ -15112,57 +15252,6 @@
       </p:pic>
       <p:sp>
         <p:nvSpPr>
-          <p:cNvPr id="10" name="Shape 178">
-            <a:extLst>
-              <a:ext uri="{FF2B5EF4-FFF2-40B4-BE49-F238E27FC236}">
-                <a16:creationId xmlns:a16="http://schemas.microsoft.com/office/drawing/2014/main" id="{D86CFB01-FCC2-4AE5-46B1-F2D8E27EABCA}"/>
-              </a:ext>
-            </a:extLst>
-          </p:cNvPr>
-          <p:cNvSpPr txBox="1"/>
-          <p:nvPr/>
-        </p:nvSpPr>
-        <p:spPr>
-          <a:xfrm>
-            <a:off x="4531570" y="255519"/>
-            <a:ext cx="2446679" cy="903909"/>
-          </a:xfrm>
-          <a:prstGeom prst="rect">
-            <a:avLst/>
-          </a:prstGeom>
-          <a:noFill/>
-          <a:ln>
-            <a:noFill/>
-          </a:ln>
-        </p:spPr>
-        <p:txBody>
-          <a:bodyPr lIns="91425" tIns="45700" rIns="91425" bIns="45700" anchor="t" anchorCtr="0">
-            <a:noAutofit/>
-          </a:bodyPr>
-          <a:lstStyle/>
-          <a:p>
-            <a:pPr>
-              <a:buSzPct val="25000"/>
-            </a:pPr>
-            <a:r>
-              <a:rPr lang="en-US" sz="4000" dirty="0">
-                <a:solidFill>
-                  <a:schemeClr val="tx1">
-                    <a:lumMod val="75000"/>
-                  </a:schemeClr>
-                </a:solidFill>
-                <a:latin typeface="+mj-lt"/>
-                <a:ea typeface="Calibri"/>
-                <a:cs typeface="Calibri"/>
-                <a:sym typeface="Calibri"/>
-              </a:rPr>
-              <a:t>Basemaps</a:t>
-            </a:r>
-          </a:p>
-        </p:txBody>
-      </p:sp>
-      <p:sp>
-        <p:nvSpPr>
           <p:cNvPr id="2" name="Slide Number Placeholder 1">
             <a:extLst>
               <a:ext uri="{FF2B5EF4-FFF2-40B4-BE49-F238E27FC236}">
@@ -15209,6 +15298,49 @@
               <a:cs typeface="Calibri"/>
               <a:sym typeface="Calibri"/>
             </a:endParaRPr>
+          </a:p>
+        </p:txBody>
+      </p:sp>
+      <p:sp>
+        <p:nvSpPr>
+          <p:cNvPr id="8" name="Title 7">
+            <a:extLst>
+              <a:ext uri="{FF2B5EF4-FFF2-40B4-BE49-F238E27FC236}">
+                <a16:creationId xmlns:a16="http://schemas.microsoft.com/office/drawing/2014/main" id="{BBDFEC31-894A-4C37-9E1B-AB9BAF3CC801}"/>
+              </a:ext>
+            </a:extLst>
+          </p:cNvPr>
+          <p:cNvSpPr>
+            <a:spLocks noGrp="1"/>
+          </p:cNvSpPr>
+          <p:nvPr>
+            <p:ph type="title" idx="4294967295"/>
+          </p:nvPr>
+        </p:nvSpPr>
+        <p:spPr>
+          <a:xfrm>
+            <a:off x="4601816" y="286603"/>
+            <a:ext cx="6553863" cy="1450757"/>
+          </a:xfrm>
+        </p:spPr>
+        <p:txBody>
+          <a:bodyPr/>
+          <a:lstStyle/>
+          <a:p>
+            <a:pPr rtl="0" eaLnBrk="1" latinLnBrk="0" hangingPunct="1"/>
+            <a:r>
+              <a:rPr lang="en-US" sz="4000" kern="1200" dirty="0">
+                <a:solidFill>
+                  <a:srgbClr val="2F2F2F"/>
+                </a:solidFill>
+                <a:effectLst/>
+                <a:latin typeface="Sitka Display Semibold" pitchFamily="2" charset="0"/>
+                <a:ea typeface="Calibri" panose="020F0502020204030204" pitchFamily="34" charset="0"/>
+                <a:cs typeface="Calibri" panose="020F0502020204030204" pitchFamily="34" charset="0"/>
+              </a:rPr>
+              <a:t>Basemaps</a:t>
+            </a:r>
+            <a:endParaRPr lang="en-US" dirty="0"/>
           </a:p>
         </p:txBody>
       </p:sp>
